--- a/system-design-101/vi/lessons/sd-06-007/slides/sd-06-007.pptx
+++ b/system-design-101/vi/lessons/sd-06-007/slides/sd-06-007.pptx
@@ -1790,7 +1790,7 @@
         <p:spPr>
           <a:xfrm>
             <a:off x="914400" y="1428750"/>
-            <a:ext cx="16459200" cy="2505075"/>
+            <a:ext cx="16459200" cy="3600450"/>
           </a:xfrm>
           <a:prstGeom prst="rect">
             <a:avLst/>
@@ -1799,17 +1799,17 @@
           <a:ln/>
         </p:spPr>
         <p:txBody>
-          <a:bodyPr wrap="square" lIns="0" tIns="64294" rIns="0" bIns="-64294" rtlCol="0" anchor="t"/>
+          <a:bodyPr wrap="square" lIns="0" tIns="69437" rIns="0" bIns="-69437" rtlCol="0" anchor="t"/>
           <a:lstStyle/>
           <a:p>
             <a:pPr algn="l" indent="0" marL="0">
               <a:lnSpc>
-                <a:spcPts val="7875"/>
+                <a:spcPts val="8505"/>
               </a:lnSpc>
               <a:buNone/>
             </a:pPr>
             <a:r>
-              <a:rPr lang="en-US" sz="7500" dirty="0" spc="-1" kern="0">
+              <a:rPr lang="en-US" sz="8100" dirty="0" spc="0" kern="0">
                 <a:solidFill>
                   <a:srgbClr val="F3EEE3"/>
                 </a:solidFill>
@@ -1820,7 +1820,7 @@
               <a:t>Các</a:t>
             </a:r>
             <a:r>
-              <a:rPr lang="en-US" sz="7500" dirty="0" spc="3" kern="0">
+              <a:rPr lang="en-US" sz="8100" dirty="0" spc="2" kern="0">
                 <a:solidFill>
                   <a:srgbClr val="F3EEE3"/>
                 </a:solidFill>
@@ -1831,7 +1831,7 @@
               <a:t> cách</a:t>
             </a:r>
             <a:r>
-              <a:rPr lang="en-US" sz="7500" dirty="0" spc="1" kern="0">
+              <a:rPr lang="en-US" sz="8100" dirty="0" spc="-2" kern="0">
                 <a:solidFill>
                   <a:srgbClr val="F3EEE3"/>
                 </a:solidFill>
@@ -1842,7 +1842,7 @@
               <a:t> giảm</a:t>
             </a:r>
             <a:r>
-              <a:rPr lang="en-US" sz="7500" dirty="0" spc="19" kern="0">
+              <a:rPr lang="en-US" sz="8100" dirty="0" spc="21" kern="0">
                 <a:solidFill>
                   <a:srgbClr val="F3EEE3"/>
                 </a:solidFill>
@@ -1853,7 +1853,7 @@
               <a:t> độ</a:t>
             </a:r>
             <a:r>
-              <a:rPr lang="en-US" sz="7500" dirty="0" spc="-23" kern="0">
+              <a:rPr lang="en-US" sz="8100" dirty="0" spc="-24" kern="0">
                 <a:solidFill>
                   <a:srgbClr val="F3EEE3"/>
                 </a:solidFill>
@@ -1864,7 +1864,7 @@
               <a:t> trễ</a:t>
             </a:r>
             <a:r>
-              <a:rPr lang="en-US" sz="7500" dirty="0" spc="3" kern="0">
+              <a:rPr lang="en-US" sz="8100" dirty="0" spc="2" kern="0">
                 <a:solidFill>
                   <a:srgbClr val="F3EEE3"/>
                 </a:solidFill>
@@ -1875,7 +1875,7 @@
               <a:t> hay</a:t>
             </a:r>
             <a:r>
-              <a:rPr lang="en-US" sz="7500" dirty="0" spc="22" kern="0">
+              <a:rPr lang="en-US" sz="8100" dirty="0" spc="24" kern="0">
                 <a:solidFill>
                   <a:srgbClr val="F3EEE3"/>
                 </a:solidFill>
@@ -1886,7 +1886,7 @@
               <a:t> dùng,</a:t>
             </a:r>
             <a:r>
-              <a:rPr lang="en-US" sz="7500" dirty="0" spc="-81" kern="0">
+              <a:rPr lang="en-US" sz="8100" dirty="0" spc="-88" kern="0">
                 <a:solidFill>
                   <a:srgbClr val="F3EEE3"/>
                 </a:solidFill>
@@ -1897,7 +1897,7 @@
               <a:t> và</a:t>
             </a:r>
             <a:r>
-              <a:rPr lang="en-US" sz="7500" dirty="0" spc="-38" kern="0">
+              <a:rPr lang="en-US" sz="8100" dirty="0" spc="-39" kern="0">
                 <a:solidFill>
                   <a:srgbClr val="F3EEE3"/>
                 </a:solidFill>
@@ -1908,7 +1908,7 @@
               <a:t> vì</a:t>
             </a:r>
             <a:r>
-              <a:rPr lang="en-US" sz="7500" dirty="0" spc="0" kern="0">
+              <a:rPr lang="en-US" sz="8100" dirty="0" spc="0" kern="0">
                 <a:solidFill>
                   <a:srgbClr val="F3EEE3"/>
                 </a:solidFill>
@@ -1919,7 +1919,7 @@
               <a:t> sao</a:t>
             </a:r>
             <a:r>
-              <a:rPr lang="en-US" sz="7500" dirty="0" spc="6" kern="0">
+              <a:rPr lang="en-US" sz="8100" dirty="0" spc="2" kern="0">
                 <a:solidFill>
                   <a:srgbClr val="F3EEE3"/>
                 </a:solidFill>
@@ -1930,7 +1930,7 @@
               <a:t> phải</a:t>
             </a:r>
             <a:r>
-              <a:rPr lang="en-US" sz="7500" dirty="0" spc="19" kern="0">
+              <a:rPr lang="en-US" sz="8100" dirty="0" spc="22" kern="0">
                 <a:solidFill>
                   <a:srgbClr val="F3EEE3"/>
                 </a:solidFill>
@@ -1941,7 +1941,7 @@
               <a:t> đo</a:t>
             </a:r>
             <a:r>
-              <a:rPr lang="en-US" sz="7500" dirty="0" spc="-83" kern="0">
+              <a:rPr lang="en-US" sz="8100" dirty="0" spc="-90" kern="0">
                 <a:solidFill>
                   <a:srgbClr val="F3EEE3"/>
                 </a:solidFill>
@@ -1951,7 +1951,7 @@
               </a:rPr>
               <a:t> trước</a:t>
             </a:r>
-            <a:endParaRPr lang="en-US" sz="7500" dirty="0"/>
+            <a:endParaRPr lang="en-US" sz="8100" dirty="0"/>
           </a:p>
         </p:txBody>
       </p:sp>
@@ -1963,7 +1963,7 @@
         </p:nvSpPr>
         <p:spPr>
           <a:xfrm>
-            <a:off x="914400" y="4095750"/>
+            <a:off x="914400" y="5048250"/>
             <a:ext cx="16459200" cy="571500"/>
           </a:xfrm>
           <a:prstGeom prst="rect">
@@ -2090,7 +2090,7 @@
         </p:nvSpPr>
         <p:spPr>
           <a:xfrm>
-            <a:off x="914400" y="5524500"/>
+            <a:off x="914400" y="6096000"/>
             <a:ext cx="3810000" cy="2476500"/>
           </a:xfrm>
           <a:prstGeom prst="roundRect">
@@ -2117,7 +2117,7 @@
         </p:nvSpPr>
         <p:spPr>
           <a:xfrm>
-            <a:off x="1219200" y="5715000"/>
+            <a:off x="1219200" y="6286500"/>
             <a:ext cx="3200400" cy="762000"/>
           </a:xfrm>
           <a:prstGeom prst="rect">
@@ -2156,7 +2156,7 @@
         </p:nvSpPr>
         <p:spPr>
           <a:xfrm>
-            <a:off x="1219200" y="6572250"/>
+            <a:off x="1219200" y="7143750"/>
             <a:ext cx="3200400" cy="571500"/>
           </a:xfrm>
           <a:prstGeom prst="rect">
@@ -2195,7 +2195,7 @@
         </p:nvSpPr>
         <p:spPr>
           <a:xfrm>
-            <a:off x="1219200" y="7239000"/>
+            <a:off x="1219200" y="7810500"/>
             <a:ext cx="3200400" cy="571500"/>
           </a:xfrm>
           <a:prstGeom prst="rect">
@@ -2261,13 +2261,13 @@
       </p:sp>
       <p:sp>
         <p:nvSpPr>
-          <p:cNvPr id="9" name="Connector line-1792371347360-958481836"/>
-          <p:cNvSpPr/>
-          <p:nvPr/>
-        </p:nvSpPr>
-        <p:spPr>
-          <a:xfrm>
-            <a:off x="4762500" y="6762750"/>
+          <p:cNvPr id="9" name="Connector line-1792371727748-275303840"/>
+          <p:cNvSpPr/>
+          <p:nvPr/>
+        </p:nvSpPr>
+        <p:spPr>
+          <a:xfrm>
+            <a:off x="4762500" y="7334250"/>
             <a:ext cx="342900" cy="0"/>
           </a:xfrm>
           <a:prstGeom prst="line">
@@ -2292,7 +2292,7 @@
         </p:nvSpPr>
         <p:spPr>
           <a:xfrm>
-            <a:off x="5143500" y="5524500"/>
+            <a:off x="5143500" y="6096000"/>
             <a:ext cx="3810000" cy="2476500"/>
           </a:xfrm>
           <a:prstGeom prst="roundRect">
@@ -2319,7 +2319,7 @@
         </p:nvSpPr>
         <p:spPr>
           <a:xfrm>
-            <a:off x="5448300" y="5715000"/>
+            <a:off x="5448300" y="6286500"/>
             <a:ext cx="3200400" cy="762000"/>
           </a:xfrm>
           <a:prstGeom prst="rect">
@@ -2358,7 +2358,7 @@
         </p:nvSpPr>
         <p:spPr>
           <a:xfrm>
-            <a:off x="5448300" y="6572250"/>
+            <a:off x="5448300" y="7143750"/>
             <a:ext cx="3200400" cy="571500"/>
           </a:xfrm>
           <a:prstGeom prst="rect">
@@ -2397,7 +2397,7 @@
         </p:nvSpPr>
         <p:spPr>
           <a:xfrm>
-            <a:off x="5448300" y="7239000"/>
+            <a:off x="5448300" y="7810500"/>
             <a:ext cx="3200400" cy="571500"/>
           </a:xfrm>
           <a:prstGeom prst="rect">
@@ -2474,13 +2474,13 @@
       </p:sp>
       <p:sp>
         <p:nvSpPr>
-          <p:cNvPr id="14" name="Connector line-1792371347369-475040563"/>
-          <p:cNvSpPr/>
-          <p:nvPr/>
-        </p:nvSpPr>
-        <p:spPr>
-          <a:xfrm>
-            <a:off x="8991600" y="6762750"/>
+          <p:cNvPr id="14" name="Connector line-1792371727758-301122368"/>
+          <p:cNvSpPr/>
+          <p:nvPr/>
+        </p:nvSpPr>
+        <p:spPr>
+          <a:xfrm>
+            <a:off x="8991600" y="7334250"/>
             <a:ext cx="342900" cy="0"/>
           </a:xfrm>
           <a:prstGeom prst="line">
@@ -2505,7 +2505,7 @@
         </p:nvSpPr>
         <p:spPr>
           <a:xfrm>
-            <a:off x="9372600" y="5524500"/>
+            <a:off x="9372600" y="6096000"/>
             <a:ext cx="3810000" cy="2476500"/>
           </a:xfrm>
           <a:prstGeom prst="roundRect">
@@ -2532,7 +2532,7 @@
         </p:nvSpPr>
         <p:spPr>
           <a:xfrm>
-            <a:off x="9677400" y="5715000"/>
+            <a:off x="9677400" y="6286500"/>
             <a:ext cx="3200400" cy="762000"/>
           </a:xfrm>
           <a:prstGeom prst="rect">
@@ -2571,7 +2571,7 @@
         </p:nvSpPr>
         <p:spPr>
           <a:xfrm>
-            <a:off x="9677400" y="6572250"/>
+            <a:off x="9677400" y="7143750"/>
             <a:ext cx="3200400" cy="571500"/>
           </a:xfrm>
           <a:prstGeom prst="rect">
@@ -2621,7 +2621,7 @@
         </p:nvSpPr>
         <p:spPr>
           <a:xfrm>
-            <a:off x="9677400" y="7239000"/>
+            <a:off x="9677400" y="7810500"/>
             <a:ext cx="3200400" cy="571500"/>
           </a:xfrm>
           <a:prstGeom prst="rect">
@@ -2698,13 +2698,13 @@
       </p:sp>
       <p:sp>
         <p:nvSpPr>
-          <p:cNvPr id="19" name="Connector line-1792371347374-150005669"/>
-          <p:cNvSpPr/>
-          <p:nvPr/>
-        </p:nvSpPr>
-        <p:spPr>
-          <a:xfrm>
-            <a:off x="13220700" y="6762750"/>
+          <p:cNvPr id="19" name="Connector line-1792371727764-607441252"/>
+          <p:cNvSpPr/>
+          <p:nvPr/>
+        </p:nvSpPr>
+        <p:spPr>
+          <a:xfrm>
+            <a:off x="13220700" y="7334250"/>
             <a:ext cx="342900" cy="0"/>
           </a:xfrm>
           <a:prstGeom prst="line">
@@ -2729,7 +2729,7 @@
         </p:nvSpPr>
         <p:spPr>
           <a:xfrm>
-            <a:off x="13601700" y="5524500"/>
+            <a:off x="13601700" y="6096000"/>
             <a:ext cx="3810000" cy="2476500"/>
           </a:xfrm>
           <a:prstGeom prst="roundRect">
@@ -2756,7 +2756,7 @@
         </p:nvSpPr>
         <p:spPr>
           <a:xfrm>
-            <a:off x="13906500" y="5715000"/>
+            <a:off x="13906500" y="6286500"/>
             <a:ext cx="3200400" cy="762000"/>
           </a:xfrm>
           <a:prstGeom prst="rect">
@@ -2795,7 +2795,7 @@
         </p:nvSpPr>
         <p:spPr>
           <a:xfrm>
-            <a:off x="13906500" y="6572250"/>
+            <a:off x="13906500" y="7143750"/>
             <a:ext cx="3200400" cy="571500"/>
           </a:xfrm>
           <a:prstGeom prst="rect">
@@ -2856,7 +2856,7 @@
         </p:nvSpPr>
         <p:spPr>
           <a:xfrm>
-            <a:off x="13906500" y="7239000"/>
+            <a:off x="13906500" y="7810500"/>
             <a:ext cx="3200400" cy="571500"/>
           </a:xfrm>
           <a:prstGeom prst="rect">
